--- a/courses/俄语课件/俄语_Day2_L1.pptx
+++ b/courses/俄语课件/俄语_Day2_L1.pptx
@@ -10,7 +10,6 @@
     <p:sldId id="258" r:id="rId9"/>
     <p:sldId id="259" r:id="rId10"/>
     <p:sldId id="260" r:id="rId11"/>
-    <p:sldId id="261" r:id="rId12"/>
   </p:sldIdLst>
   <p:sldSz cx="9144000" cy="6858000" type="screen4x3"/>
   <p:notesSz cx="6858000" cy="9144000"/>
@@ -3201,66 +3200,14 @@
               </a:defRPr>
             </a:pPr>
             <a:r>
-              <a:t>名词第3格</a:t>
-            </a:r>
-          </a:p>
-        </p:txBody>
-      </p:sp>
-      <p:sp>
-        <p:nvSpPr>
-          <p:cNvPr id="5" name="Rounded Rectangle 4"/>
-          <p:cNvSpPr/>
-          <p:nvPr/>
-        </p:nvSpPr>
-        <p:spPr>
-          <a:xfrm>
-            <a:off x="1828800" y="4572000"/>
-            <a:ext cx="5486400" cy="731520"/>
-          </a:xfrm>
-          <a:prstGeom prst="roundRect">
-            <a:avLst/>
-          </a:prstGeom>
-          <a:solidFill>
-            <a:srgbClr val="4682B4"/>
-          </a:solidFill>
-          <a:ln>
-            <a:noFill/>
-          </a:ln>
-        </p:spPr>
-        <p:style>
-          <a:lnRef idx="1">
-            <a:schemeClr val="accent1"/>
-          </a:lnRef>
-          <a:fillRef idx="3">
-            <a:schemeClr val="accent1"/>
-          </a:fillRef>
-          <a:effectRef idx="2">
-            <a:schemeClr val="accent1"/>
-          </a:effectRef>
-          <a:fontRef idx="minor">
-            <a:schemeClr val="lt1"/>
-          </a:fontRef>
-        </p:style>
-        <p:txBody>
-          <a:bodyPr rtlCol="0" anchor="ctr"/>
-          <a:lstStyle/>
-          <a:p>
-            <a:pPr algn="ctr">
-              <a:defRPr sz="2200">
-                <a:solidFill>
-                  <a:srgbClr val="FFFFFF"/>
-                </a:solidFill>
-              </a:defRPr>
-            </a:pPr>
-            <a:r>
-              <a:t>Datelny padesh</a:t>
-            </a:r>
-          </a:p>
-        </p:txBody>
-      </p:sp>
-      <p:sp>
-        <p:nvSpPr>
-          <p:cNvPr id="6" name="TextBox 5"/>
+              <a:t>名词第3格（给谁）</a:t>
+            </a:r>
+          </a:p>
+        </p:txBody>
+      </p:sp>
+      <p:sp>
+        <p:nvSpPr>
+          <p:cNvPr id="5" name="TextBox 4"/>
           <p:cNvSpPr txBox="1"/>
           <p:nvPr/>
         </p:nvSpPr>
@@ -3288,7 +3235,7 @@
               </a:defRPr>
             </a:pPr>
             <a:r>
-              <a:t>Day2/84</a:t>
+              <a:t>День 2/84</a:t>
             </a:r>
           </a:p>
         </p:txBody>
@@ -3419,7 +3366,7 @@
               </a:defRPr>
             </a:pPr>
             <a:r>
-              <a:t>Datelny padesh</a:t>
+              <a:t>Дательный падеж</a:t>
             </a:r>
           </a:p>
         </p:txBody>
@@ -3454,7 +3401,7 @@
               </a:defRPr>
             </a:pPr>
             <a:r>
-              <a:t>第3格 = 间接宾语，表示'给谁/为谁'</a:t>
+              <a:t>第3格 = 间接宾语，表示«给谁/为谁»</a:t>
             </a:r>
           </a:p>
         </p:txBody>
@@ -3489,7 +3436,7 @@
               </a:defRPr>
             </a:pPr>
             <a:r>
-              <a:t>Daite knigu studentu. = 把书给学生。</a:t>
+              <a:t>Дайте книгу студенту. = 把书给学生。</a:t>
             </a:r>
           </a:p>
         </p:txBody>
@@ -3541,7 +3488,7 @@
               </a:defRPr>
             </a:pPr>
             <a:r>
-              <a:t>Ya pomogayu drugu. = 我帮助朋友。</a:t>
+              <a:t>Я помогаю другу. = 我帮助朋友。</a:t>
             </a:r>
           </a:p>
         </p:txBody>
@@ -3593,7 +3540,7 @@
               </a:defRPr>
             </a:pPr>
             <a:r>
-              <a:t>第3格回答问题：komu? chemu? (给谁？向谁？)</a:t>
+              <a:t>第3格回答问题：кому? чему? (给谁？向什么？)</a:t>
             </a:r>
           </a:p>
         </p:txBody>
@@ -3628,7 +3575,7 @@
               </a:defRPr>
             </a:pPr>
             <a:r>
-              <a:t>Day2/84</a:t>
+              <a:t>День 2/84</a:t>
             </a:r>
           </a:p>
         </p:txBody>
@@ -3759,7 +3706,7 @@
               </a:defRPr>
             </a:pPr>
             <a:r>
-              <a:t>Sklonenie</a:t>
+              <a:t>Склонение</a:t>
             </a:r>
           </a:p>
         </p:txBody>
@@ -3829,7 +3776,7 @@
               </a:defRPr>
             </a:pPr>
             <a:r>
-              <a:t>student &gt; studentu (给学生)</a:t>
+              <a:t>студдент → студенту (给学生)</a:t>
             </a:r>
           </a:p>
         </p:txBody>
@@ -3864,7 +3811,7 @@
               </a:defRPr>
             </a:pPr>
             <a:r>
-              <a:t>drug &gt; drugu (给朋友)</a:t>
+              <a:t>друг → другу (给朋友)</a:t>
             </a:r>
           </a:p>
         </p:txBody>
@@ -3934,7 +3881,7 @@
               </a:defRPr>
             </a:pPr>
             <a:r>
-              <a:t>kniga &gt; knige (给书)</a:t>
+              <a:t>книга → книге (给书)</a:t>
             </a:r>
           </a:p>
         </p:txBody>
@@ -3969,7 +3916,7 @@
               </a:defRPr>
             </a:pPr>
             <a:r>
-              <a:t>devushka &gt; devushke (给姑娘)</a:t>
+              <a:t>девушка → девушке (给姑娘)</a:t>
             </a:r>
           </a:p>
         </p:txBody>
@@ -4021,7 +3968,7 @@
               </a:defRPr>
             </a:pPr>
             <a:r>
-              <a:t>规律：词尾加 -u 或 -e</a:t>
+              <a:t>规律：词尾加 -у 或 -е</a:t>
             </a:r>
           </a:p>
         </p:txBody>
@@ -4056,7 +4003,7 @@
               </a:defRPr>
             </a:pPr>
             <a:r>
-              <a:t>Day2/84</a:t>
+              <a:t>День 2/84</a:t>
             </a:r>
           </a:p>
         </p:txBody>
@@ -4187,7 +4134,7 @@
               </a:defRPr>
             </a:pPr>
             <a:r>
-              <a:t>Mestoimeniya</a:t>
+              <a:t>Местоимения</a:t>
             </a:r>
           </a:p>
         </p:txBody>
@@ -4222,7 +4169,7 @@
               </a:defRPr>
             </a:pPr>
             <a:r>
-              <a:t>我 &gt; мне, 你 &gt; тебе, 他 &gt; ему</a:t>
+              <a:t>я → мне, ты → тебе, он → ему</a:t>
             </a:r>
           </a:p>
         </p:txBody>
@@ -4257,7 +4204,7 @@
               </a:defRPr>
             </a:pPr>
             <a:r>
-              <a:t>她 &gt; ей, 我们 &gt; нам, 你们 &gt; вам</a:t>
+              <a:t>она → ей, мы → нам, вы → вам</a:t>
             </a:r>
           </a:p>
         </p:txBody>
@@ -4309,7 +4256,7 @@
               </a:defRPr>
             </a:pPr>
             <a:r>
-              <a:t>Oni pomogayut mne. = 他们帮助我。</a:t>
+              <a:t>Они помогают мне. = 他们帮助我。</a:t>
             </a:r>
           </a:p>
         </p:txBody>
@@ -4361,7 +4308,7 @@
               </a:defRPr>
             </a:pPr>
             <a:r>
-              <a:t>Ya dayu knigu yey. = 我把书给她。</a:t>
+              <a:t>Я даю книгу ей. = 我把书给她。</a:t>
             </a:r>
           </a:p>
         </p:txBody>
@@ -4448,7 +4395,7 @@
               </a:defRPr>
             </a:pPr>
             <a:r>
-              <a:t>Day2/84</a:t>
+              <a:t>День 2/84</a:t>
             </a:r>
           </a:p>
         </p:txBody>
@@ -4544,7 +4491,7 @@
               </a:defRPr>
             </a:pPr>
             <a:r>
-              <a:t>四、第3格与动词搭配</a:t>
+              <a:t>四、课后练习</a:t>
             </a:r>
           </a:p>
         </p:txBody>
@@ -4579,7 +4526,7 @@
               </a:defRPr>
             </a:pPr>
             <a:r>
-              <a:t>Glagoly s datelnym</a:t>
+              <a:t>Упражнения</a:t>
             </a:r>
           </a:p>
         </p:txBody>
@@ -4607,14 +4554,14 @@
           <a:lstStyle/>
           <a:p>
             <a:pPr>
-              <a:defRPr sz="1600" b="1">
-                <a:solidFill>
-                  <a:srgbClr val="1E3C72"/>
+              <a:defRPr sz="1500">
+                <a:solidFill>
+                  <a:srgbClr val="333333"/>
                 </a:solidFill>
               </a:defRPr>
             </a:pPr>
             <a:r>
-              <a:t>常用动词：</a:t>
+              <a:t>1. 将下列名词变为第3格：</a:t>
             </a:r>
           </a:p>
         </p:txBody>
@@ -4627,7 +4574,7 @@
         </p:nvSpPr>
         <p:spPr>
           <a:xfrm>
-            <a:off x="457200" y="1828800"/>
+            <a:off x="457200" y="1847088"/>
             <a:ext cx="8229600" cy="365760"/>
           </a:xfrm>
           <a:prstGeom prst="rect">
@@ -4649,7 +4596,7 @@
               </a:defRPr>
             </a:pPr>
             <a:r>
-              <a:t>pomogat (帮助) + 第3格</a:t>
+              <a:t>   дом, книга, друг, студдент, девушка</a:t>
             </a:r>
           </a:p>
         </p:txBody>
@@ -4662,7 +4609,7 @@
         </p:nvSpPr>
         <p:spPr>
           <a:xfrm>
-            <a:off x="457200" y="2212848"/>
+            <a:off x="457200" y="2231136"/>
             <a:ext cx="8229600" cy="365760"/>
           </a:xfrm>
           <a:prstGeom prst="rect">
@@ -4683,9 +4630,6 @@
                 </a:solidFill>
               </a:defRPr>
             </a:pPr>
-            <a:r>
-              <a:t>davat (给) + 第3格</a:t>
-            </a:r>
           </a:p>
         </p:txBody>
       </p:sp>
@@ -4697,7 +4641,7 @@
         </p:nvSpPr>
         <p:spPr>
           <a:xfrm>
-            <a:off x="457200" y="2596896"/>
+            <a:off x="457200" y="2615184"/>
             <a:ext cx="8229600" cy="365760"/>
           </a:xfrm>
           <a:prstGeom prst="rect">
@@ -4719,73 +4663,21 @@
               </a:defRPr>
             </a:pPr>
             <a:r>
-              <a:t>rasskazyvat (告诉) + 第3格</a:t>
-            </a:r>
-          </a:p>
-        </p:txBody>
-      </p:sp>
-      <p:sp>
-        <p:nvSpPr>
-          <p:cNvPr id="9" name="Rounded Rectangle 8"/>
-          <p:cNvSpPr/>
-          <p:nvPr/>
-        </p:nvSpPr>
-        <p:spPr>
-          <a:xfrm>
-            <a:off x="457200" y="2980944"/>
-            <a:ext cx="8229600" cy="502920"/>
-          </a:xfrm>
-          <a:prstGeom prst="roundRect">
-            <a:avLst/>
-          </a:prstGeom>
-          <a:solidFill>
-            <a:srgbClr val="4682B4"/>
-          </a:solidFill>
-          <a:ln>
-            <a:noFill/>
-          </a:ln>
-        </p:spPr>
-        <p:style>
-          <a:lnRef idx="1">
-            <a:schemeClr val="accent1"/>
-          </a:lnRef>
-          <a:fillRef idx="3">
-            <a:schemeClr val="accent1"/>
-          </a:fillRef>
-          <a:effectRef idx="2">
-            <a:schemeClr val="accent1"/>
-          </a:effectRef>
-          <a:fontRef idx="minor">
-            <a:schemeClr val="lt1"/>
-          </a:fontRef>
-        </p:style>
-        <p:txBody>
-          <a:bodyPr rtlCol="0" anchor="ctr" wrap="square"/>
-          <a:lstStyle/>
-          <a:p>
-            <a:pPr algn="ctr">
-              <a:defRPr sz="1500">
-                <a:solidFill>
-                  <a:srgbClr val="FFFFFF"/>
-                </a:solidFill>
-              </a:defRPr>
-            </a:pPr>
-            <a:r>
-              <a:t>Uchitel pomogayet studentam. = 老师帮助学生们。</a:t>
-            </a:r>
-          </a:p>
-        </p:txBody>
-      </p:sp>
-      <p:sp>
-        <p:nvSpPr>
-          <p:cNvPr id="10" name="TextBox 9"/>
+              <a:t>2. 用人称代词填空：</a:t>
+            </a:r>
+          </a:p>
+        </p:txBody>
+      </p:sp>
+      <p:sp>
+        <p:nvSpPr>
+          <p:cNvPr id="9" name="TextBox 8"/>
           <p:cNvSpPr txBox="1"/>
           <p:nvPr/>
         </p:nvSpPr>
         <p:spPr>
           <a:xfrm>
-            <a:off x="7772400" y="6583680"/>
-            <a:ext cx="1188720" cy="274320"/>
+            <a:off x="457200" y="2999232"/>
+            <a:ext cx="8229600" cy="365760"/>
           </a:xfrm>
           <a:prstGeom prst="rect">
             <a:avLst/>
@@ -4798,90 +4690,29 @@
           </a:bodyPr>
           <a:lstStyle/>
           <a:p>
-            <a:pPr algn="r">
-              <a:defRPr sz="1100">
-                <a:solidFill>
-                  <a:srgbClr val="A0A0A0"/>
+            <a:pPr>
+              <a:defRPr sz="1500">
+                <a:solidFill>
+                  <a:srgbClr val="333333"/>
                 </a:solidFill>
               </a:defRPr>
             </a:pPr>
             <a:r>
-              <a:t>Day2/84</a:t>
-            </a:r>
-          </a:p>
-        </p:txBody>
-      </p:sp>
-    </p:spTree>
-  </p:cSld>
-  <p:clrMapOvr>
-    <a:masterClrMapping/>
-  </p:clrMapOvr>
-</p:sld>
-</file>
-
-<file path=ppt/slides/slide6.xml><?xml version="1.0" encoding="utf-8"?>
-<p:sld xmlns:a="http://schemas.openxmlformats.org/drawingml/2006/main" xmlns:p="http://schemas.openxmlformats.org/presentationml/2006/main" xmlns:r="http://schemas.openxmlformats.org/officeDocument/2006/relationships">
-  <p:cSld>
-    <p:spTree>
-      <p:nvGrpSpPr>
-        <p:cNvPr id="1" name=""/>
-        <p:cNvGrpSpPr/>
-        <p:nvPr/>
-      </p:nvGrpSpPr>
-      <p:grpSpPr/>
-      <p:sp>
-        <p:nvSpPr>
-          <p:cNvPr id="2" name="Rectangle 1"/>
-          <p:cNvSpPr/>
-          <p:nvPr/>
-        </p:nvSpPr>
-        <p:spPr>
-          <a:xfrm>
-            <a:off x="0" y="0"/>
-            <a:ext cx="9144000" cy="1280160"/>
-          </a:xfrm>
-          <a:prstGeom prst="rect">
-            <a:avLst/>
-          </a:prstGeom>
-          <a:solidFill>
-            <a:srgbClr val="1E3C72"/>
-          </a:solidFill>
-          <a:ln>
-            <a:noFill/>
-          </a:ln>
-        </p:spPr>
-        <p:style>
-          <a:lnRef idx="1">
-            <a:schemeClr val="accent1"/>
-          </a:lnRef>
-          <a:fillRef idx="3">
-            <a:schemeClr val="accent1"/>
-          </a:fillRef>
-          <a:effectRef idx="2">
-            <a:schemeClr val="accent1"/>
-          </a:effectRef>
-          <a:fontRef idx="minor">
-            <a:schemeClr val="lt1"/>
-          </a:fontRef>
-        </p:style>
-        <p:txBody>
-          <a:bodyPr rtlCol="0" anchor="ctr"/>
-          <a:lstStyle/>
-          <a:p>
-            <a:pPr algn="ctr"/>
-          </a:p>
-        </p:txBody>
-      </p:sp>
-      <p:sp>
-        <p:nvSpPr>
-          <p:cNvPr id="3" name="TextBox 2"/>
+              <a:t>   Я даю книгу ___ (он).</a:t>
+            </a:r>
+          </a:p>
+        </p:txBody>
+      </p:sp>
+      <p:sp>
+        <p:nvSpPr>
+          <p:cNvPr id="10" name="TextBox 9"/>
           <p:cNvSpPr txBox="1"/>
           <p:nvPr/>
         </p:nvSpPr>
         <p:spPr>
           <a:xfrm>
-            <a:off x="457200" y="228600"/>
-            <a:ext cx="8229600" cy="640080"/>
+            <a:off x="457200" y="3383279"/>
+            <a:ext cx="8229600" cy="365760"/>
           </a:xfrm>
           <a:prstGeom prst="rect">
             <a:avLst/>
@@ -4895,27 +4726,27 @@
           <a:lstStyle/>
           <a:p>
             <a:pPr>
-              <a:defRPr sz="3200" b="1">
-                <a:solidFill>
-                  <a:srgbClr val="FFFFFF"/>
+              <a:defRPr sz="1500">
+                <a:solidFill>
+                  <a:srgbClr val="333333"/>
                 </a:solidFill>
               </a:defRPr>
             </a:pPr>
             <a:r>
-              <a:t>五、课后练习</a:t>
-            </a:r>
-          </a:p>
-        </p:txBody>
-      </p:sp>
-      <p:sp>
-        <p:nvSpPr>
-          <p:cNvPr id="4" name="TextBox 3"/>
+              <a:t>   Он помогает ___ (она).</a:t>
+            </a:r>
+          </a:p>
+        </p:txBody>
+      </p:sp>
+      <p:sp>
+        <p:nvSpPr>
+          <p:cNvPr id="11" name="TextBox 10"/>
           <p:cNvSpPr txBox="1"/>
           <p:nvPr/>
         </p:nvSpPr>
         <p:spPr>
           <a:xfrm>
-            <a:off x="457200" y="777240"/>
+            <a:off x="457200" y="3767328"/>
             <a:ext cx="8229600" cy="365760"/>
           </a:xfrm>
           <a:prstGeom prst="rect">
@@ -4930,27 +4761,24 @@
           <a:lstStyle/>
           <a:p>
             <a:pPr>
-              <a:defRPr sz="1800">
-                <a:solidFill>
-                  <a:srgbClr val="C8DCFF"/>
+              <a:defRPr sz="1500">
+                <a:solidFill>
+                  <a:srgbClr val="333333"/>
                 </a:solidFill>
               </a:defRPr>
             </a:pPr>
-            <a:r>
-              <a:t>Uprazhneniya</a:t>
-            </a:r>
-          </a:p>
-        </p:txBody>
-      </p:sp>
-      <p:sp>
-        <p:nvSpPr>
-          <p:cNvPr id="5" name="TextBox 4"/>
+          </a:p>
+        </p:txBody>
+      </p:sp>
+      <p:sp>
+        <p:nvSpPr>
+          <p:cNvPr id="12" name="TextBox 11"/>
           <p:cNvSpPr txBox="1"/>
           <p:nvPr/>
         </p:nvSpPr>
         <p:spPr>
           <a:xfrm>
-            <a:off x="457200" y="1463040"/>
+            <a:off x="457200" y="4151376"/>
             <a:ext cx="8229600" cy="365760"/>
           </a:xfrm>
           <a:prstGeom prst="rect">
@@ -4972,20 +4800,20 @@
               </a:defRPr>
             </a:pPr>
             <a:r>
-              <a:t>1. 将下列名词变为第3格：</a:t>
-            </a:r>
-          </a:p>
-        </p:txBody>
-      </p:sp>
-      <p:sp>
-        <p:nvSpPr>
-          <p:cNvPr id="6" name="TextBox 5"/>
+              <a:t>3. 中译俄：</a:t>
+            </a:r>
+          </a:p>
+        </p:txBody>
+      </p:sp>
+      <p:sp>
+        <p:nvSpPr>
+          <p:cNvPr id="13" name="TextBox 12"/>
           <p:cNvSpPr txBox="1"/>
           <p:nvPr/>
         </p:nvSpPr>
         <p:spPr>
           <a:xfrm>
-            <a:off x="457200" y="1847088"/>
+            <a:off x="457200" y="4535424"/>
             <a:ext cx="8229600" cy="365760"/>
           </a:xfrm>
           <a:prstGeom prst="rect">
@@ -5007,20 +4835,20 @@
               </a:defRPr>
             </a:pPr>
             <a:r>
-              <a:t>   dom, kniga, drug, student, devushka</a:t>
-            </a:r>
-          </a:p>
-        </p:txBody>
-      </p:sp>
-      <p:sp>
-        <p:nvSpPr>
-          <p:cNvPr id="7" name="TextBox 6"/>
+              <a:t>   我把书给朋友。</a:t>
+            </a:r>
+          </a:p>
+        </p:txBody>
+      </p:sp>
+      <p:sp>
+        <p:nvSpPr>
+          <p:cNvPr id="14" name="TextBox 13"/>
           <p:cNvSpPr txBox="1"/>
           <p:nvPr/>
         </p:nvSpPr>
         <p:spPr>
           <a:xfrm>
-            <a:off x="457200" y="2231136"/>
+            <a:off x="457200" y="4919472"/>
             <a:ext cx="8229600" cy="365760"/>
           </a:xfrm>
           <a:prstGeom prst="rect">
@@ -5041,19 +4869,22 @@
                 </a:solidFill>
               </a:defRPr>
             </a:pPr>
-          </a:p>
-        </p:txBody>
-      </p:sp>
-      <p:sp>
-        <p:nvSpPr>
-          <p:cNvPr id="8" name="TextBox 7"/>
+            <a:r>
+              <a:t>   妈妈帮助女儿。</a:t>
+            </a:r>
+          </a:p>
+        </p:txBody>
+      </p:sp>
+      <p:sp>
+        <p:nvSpPr>
+          <p:cNvPr id="15" name="TextBox 14"/>
           <p:cNvSpPr txBox="1"/>
           <p:nvPr/>
         </p:nvSpPr>
         <p:spPr>
           <a:xfrm>
-            <a:off x="457200" y="2615184"/>
-            <a:ext cx="8229600" cy="365760"/>
+            <a:off x="7772400" y="6583680"/>
+            <a:ext cx="1188720" cy="274320"/>
           </a:xfrm>
           <a:prstGeom prst="rect">
             <a:avLst/>
@@ -5066,248 +4897,6 @@
           </a:bodyPr>
           <a:lstStyle/>
           <a:p>
-            <a:pPr>
-              <a:defRPr sz="1500">
-                <a:solidFill>
-                  <a:srgbClr val="333333"/>
-                </a:solidFill>
-              </a:defRPr>
-            </a:pPr>
-            <a:r>
-              <a:t>2. 用人称代词填空：</a:t>
-            </a:r>
-          </a:p>
-        </p:txBody>
-      </p:sp>
-      <p:sp>
-        <p:nvSpPr>
-          <p:cNvPr id="9" name="TextBox 8"/>
-          <p:cNvSpPr txBox="1"/>
-          <p:nvPr/>
-        </p:nvSpPr>
-        <p:spPr>
-          <a:xfrm>
-            <a:off x="457200" y="2999232"/>
-            <a:ext cx="8229600" cy="365760"/>
-          </a:xfrm>
-          <a:prstGeom prst="rect">
-            <a:avLst/>
-          </a:prstGeom>
-          <a:noFill/>
-        </p:spPr>
-        <p:txBody>
-          <a:bodyPr wrap="none">
-            <a:spAutoFit/>
-          </a:bodyPr>
-          <a:lstStyle/>
-          <a:p>
-            <a:pPr>
-              <a:defRPr sz="1500">
-                <a:solidFill>
-                  <a:srgbClr val="333333"/>
-                </a:solidFill>
-              </a:defRPr>
-            </a:pPr>
-            <a:r>
-              <a:t>   Ya dayu knigu ___ (on).</a:t>
-            </a:r>
-          </a:p>
-        </p:txBody>
-      </p:sp>
-      <p:sp>
-        <p:nvSpPr>
-          <p:cNvPr id="10" name="TextBox 9"/>
-          <p:cNvSpPr txBox="1"/>
-          <p:nvPr/>
-        </p:nvSpPr>
-        <p:spPr>
-          <a:xfrm>
-            <a:off x="457200" y="3383279"/>
-            <a:ext cx="8229600" cy="365760"/>
-          </a:xfrm>
-          <a:prstGeom prst="rect">
-            <a:avLst/>
-          </a:prstGeom>
-          <a:noFill/>
-        </p:spPr>
-        <p:txBody>
-          <a:bodyPr wrap="none">
-            <a:spAutoFit/>
-          </a:bodyPr>
-          <a:lstStyle/>
-          <a:p>
-            <a:pPr>
-              <a:defRPr sz="1500">
-                <a:solidFill>
-                  <a:srgbClr val="333333"/>
-                </a:solidFill>
-              </a:defRPr>
-            </a:pPr>
-            <a:r>
-              <a:t>   On pomogayet ___ (ona).</a:t>
-            </a:r>
-          </a:p>
-        </p:txBody>
-      </p:sp>
-      <p:sp>
-        <p:nvSpPr>
-          <p:cNvPr id="11" name="TextBox 10"/>
-          <p:cNvSpPr txBox="1"/>
-          <p:nvPr/>
-        </p:nvSpPr>
-        <p:spPr>
-          <a:xfrm>
-            <a:off x="457200" y="3767328"/>
-            <a:ext cx="8229600" cy="365760"/>
-          </a:xfrm>
-          <a:prstGeom prst="rect">
-            <a:avLst/>
-          </a:prstGeom>
-          <a:noFill/>
-        </p:spPr>
-        <p:txBody>
-          <a:bodyPr wrap="none">
-            <a:spAutoFit/>
-          </a:bodyPr>
-          <a:lstStyle/>
-          <a:p>
-            <a:pPr>
-              <a:defRPr sz="1500">
-                <a:solidFill>
-                  <a:srgbClr val="333333"/>
-                </a:solidFill>
-              </a:defRPr>
-            </a:pPr>
-          </a:p>
-        </p:txBody>
-      </p:sp>
-      <p:sp>
-        <p:nvSpPr>
-          <p:cNvPr id="12" name="TextBox 11"/>
-          <p:cNvSpPr txBox="1"/>
-          <p:nvPr/>
-        </p:nvSpPr>
-        <p:spPr>
-          <a:xfrm>
-            <a:off x="457200" y="4151376"/>
-            <a:ext cx="8229600" cy="365760"/>
-          </a:xfrm>
-          <a:prstGeom prst="rect">
-            <a:avLst/>
-          </a:prstGeom>
-          <a:noFill/>
-        </p:spPr>
-        <p:txBody>
-          <a:bodyPr wrap="none">
-            <a:spAutoFit/>
-          </a:bodyPr>
-          <a:lstStyle/>
-          <a:p>
-            <a:pPr>
-              <a:defRPr sz="1500">
-                <a:solidFill>
-                  <a:srgbClr val="333333"/>
-                </a:solidFill>
-              </a:defRPr>
-            </a:pPr>
-            <a:r>
-              <a:t>3. 中译俄：</a:t>
-            </a:r>
-          </a:p>
-        </p:txBody>
-      </p:sp>
-      <p:sp>
-        <p:nvSpPr>
-          <p:cNvPr id="13" name="TextBox 12"/>
-          <p:cNvSpPr txBox="1"/>
-          <p:nvPr/>
-        </p:nvSpPr>
-        <p:spPr>
-          <a:xfrm>
-            <a:off x="457200" y="4535424"/>
-            <a:ext cx="8229600" cy="365760"/>
-          </a:xfrm>
-          <a:prstGeom prst="rect">
-            <a:avLst/>
-          </a:prstGeom>
-          <a:noFill/>
-        </p:spPr>
-        <p:txBody>
-          <a:bodyPr wrap="none">
-            <a:spAutoFit/>
-          </a:bodyPr>
-          <a:lstStyle/>
-          <a:p>
-            <a:pPr>
-              <a:defRPr sz="1500">
-                <a:solidFill>
-                  <a:srgbClr val="333333"/>
-                </a:solidFill>
-              </a:defRPr>
-            </a:pPr>
-            <a:r>
-              <a:t>   我把书给朋友。</a:t>
-            </a:r>
-          </a:p>
-        </p:txBody>
-      </p:sp>
-      <p:sp>
-        <p:nvSpPr>
-          <p:cNvPr id="14" name="TextBox 13"/>
-          <p:cNvSpPr txBox="1"/>
-          <p:nvPr/>
-        </p:nvSpPr>
-        <p:spPr>
-          <a:xfrm>
-            <a:off x="457200" y="4919472"/>
-            <a:ext cx="8229600" cy="365760"/>
-          </a:xfrm>
-          <a:prstGeom prst="rect">
-            <a:avLst/>
-          </a:prstGeom>
-          <a:noFill/>
-        </p:spPr>
-        <p:txBody>
-          <a:bodyPr wrap="none">
-            <a:spAutoFit/>
-          </a:bodyPr>
-          <a:lstStyle/>
-          <a:p>
-            <a:pPr>
-              <a:defRPr sz="1500">
-                <a:solidFill>
-                  <a:srgbClr val="333333"/>
-                </a:solidFill>
-              </a:defRPr>
-            </a:pPr>
-            <a:r>
-              <a:t>   妈妈帮助女儿。</a:t>
-            </a:r>
-          </a:p>
-        </p:txBody>
-      </p:sp>
-      <p:sp>
-        <p:nvSpPr>
-          <p:cNvPr id="15" name="TextBox 14"/>
-          <p:cNvSpPr txBox="1"/>
-          <p:nvPr/>
-        </p:nvSpPr>
-        <p:spPr>
-          <a:xfrm>
-            <a:off x="7772400" y="6583680"/>
-            <a:ext cx="1188720" cy="274320"/>
-          </a:xfrm>
-          <a:prstGeom prst="rect">
-            <a:avLst/>
-          </a:prstGeom>
-          <a:noFill/>
-        </p:spPr>
-        <p:txBody>
-          <a:bodyPr wrap="none">
-            <a:spAutoFit/>
-          </a:bodyPr>
-          <a:lstStyle/>
-          <a:p>
             <a:pPr algn="r">
               <a:defRPr sz="1100">
                 <a:solidFill>
@@ -5316,7 +4905,7 @@
               </a:defRPr>
             </a:pPr>
             <a:r>
-              <a:t>Day2/84</a:t>
+              <a:t>День 2/84</a:t>
             </a:r>
           </a:p>
         </p:txBody>
